--- a/docs/img/画像作成用.pptx
+++ b/docs/img/画像作成用.pptx
@@ -5,12 +5,13 @@
     <p:sldMasterId id="2147483648" r:id="rId1"/>
   </p:sldMasterIdLst>
   <p:notesMasterIdLst>
-    <p:notesMasterId r:id="rId5"/>
+    <p:notesMasterId r:id="rId6"/>
   </p:notesMasterIdLst>
   <p:sldIdLst>
     <p:sldId id="258" r:id="rId2"/>
     <p:sldId id="256" r:id="rId3"/>
     <p:sldId id="257" r:id="rId4"/>
+    <p:sldId id="259" r:id="rId5"/>
   </p:sldIdLst>
   <p:sldSz cx="12192000" cy="6858000"/>
   <p:notesSz cx="6858000" cy="9144000"/>
@@ -199,7 +200,7 @@
           <a:p>
             <a:fld id="{685A68BC-8F81-4B0D-92FD-71EB7813FF7D}" type="datetimeFigureOut">
               <a:rPr kumimoji="1" lang="ja-JP" altLang="en-US" smtClean="0"/>
-              <a:t>2025/12/31</a:t>
+              <a:t>2026/7/28</a:t>
             </a:fld>
             <a:endParaRPr kumimoji="1" lang="ja-JP" altLang="en-US"/>
           </a:p>
@@ -729,7 +730,7 @@
           <a:p>
             <a:fld id="{267EFEEF-E18A-4475-85ED-60EC09292CB4}" type="datetimeFigureOut">
               <a:rPr kumimoji="1" lang="ja-JP" altLang="en-US" smtClean="0"/>
-              <a:t>2025/12/31</a:t>
+              <a:t>2026/7/28</a:t>
             </a:fld>
             <a:endParaRPr kumimoji="1" lang="ja-JP" altLang="en-US"/>
           </a:p>
@@ -959,7 +960,7 @@
           <a:p>
             <a:fld id="{267EFEEF-E18A-4475-85ED-60EC09292CB4}" type="datetimeFigureOut">
               <a:rPr kumimoji="1" lang="ja-JP" altLang="en-US" smtClean="0"/>
-              <a:t>2025/12/31</a:t>
+              <a:t>2026/7/28</a:t>
             </a:fld>
             <a:endParaRPr kumimoji="1" lang="ja-JP" altLang="en-US"/>
           </a:p>
@@ -1199,7 +1200,7 @@
           <a:p>
             <a:fld id="{267EFEEF-E18A-4475-85ED-60EC09292CB4}" type="datetimeFigureOut">
               <a:rPr kumimoji="1" lang="ja-JP" altLang="en-US" smtClean="0"/>
-              <a:t>2025/12/31</a:t>
+              <a:t>2026/7/28</a:t>
             </a:fld>
             <a:endParaRPr kumimoji="1" lang="ja-JP" altLang="en-US"/>
           </a:p>
@@ -1429,7 +1430,7 @@
           <a:p>
             <a:fld id="{267EFEEF-E18A-4475-85ED-60EC09292CB4}" type="datetimeFigureOut">
               <a:rPr kumimoji="1" lang="ja-JP" altLang="en-US" smtClean="0"/>
-              <a:t>2025/12/31</a:t>
+              <a:t>2026/7/28</a:t>
             </a:fld>
             <a:endParaRPr kumimoji="1" lang="ja-JP" altLang="en-US"/>
           </a:p>
@@ -1704,7 +1705,7 @@
           <a:p>
             <a:fld id="{267EFEEF-E18A-4475-85ED-60EC09292CB4}" type="datetimeFigureOut">
               <a:rPr kumimoji="1" lang="ja-JP" altLang="en-US" smtClean="0"/>
-              <a:t>2025/12/31</a:t>
+              <a:t>2026/7/28</a:t>
             </a:fld>
             <a:endParaRPr kumimoji="1" lang="ja-JP" altLang="en-US"/>
           </a:p>
@@ -2033,7 +2034,7 @@
           <a:p>
             <a:fld id="{267EFEEF-E18A-4475-85ED-60EC09292CB4}" type="datetimeFigureOut">
               <a:rPr kumimoji="1" lang="ja-JP" altLang="en-US" smtClean="0"/>
-              <a:t>2025/12/31</a:t>
+              <a:t>2026/7/28</a:t>
             </a:fld>
             <a:endParaRPr kumimoji="1" lang="ja-JP" altLang="en-US"/>
           </a:p>
@@ -2509,7 +2510,7 @@
           <a:p>
             <a:fld id="{267EFEEF-E18A-4475-85ED-60EC09292CB4}" type="datetimeFigureOut">
               <a:rPr kumimoji="1" lang="ja-JP" altLang="en-US" smtClean="0"/>
-              <a:t>2025/12/31</a:t>
+              <a:t>2026/7/28</a:t>
             </a:fld>
             <a:endParaRPr kumimoji="1" lang="ja-JP" altLang="en-US"/>
           </a:p>
@@ -2650,7 +2651,7 @@
           <a:p>
             <a:fld id="{267EFEEF-E18A-4475-85ED-60EC09292CB4}" type="datetimeFigureOut">
               <a:rPr kumimoji="1" lang="ja-JP" altLang="en-US" smtClean="0"/>
-              <a:t>2025/12/31</a:t>
+              <a:t>2026/7/28</a:t>
             </a:fld>
             <a:endParaRPr kumimoji="1" lang="ja-JP" altLang="en-US"/>
           </a:p>
@@ -2763,7 +2764,7 @@
           <a:p>
             <a:fld id="{267EFEEF-E18A-4475-85ED-60EC09292CB4}" type="datetimeFigureOut">
               <a:rPr kumimoji="1" lang="ja-JP" altLang="en-US" smtClean="0"/>
-              <a:t>2025/12/31</a:t>
+              <a:t>2026/7/28</a:t>
             </a:fld>
             <a:endParaRPr kumimoji="1" lang="ja-JP" altLang="en-US"/>
           </a:p>
@@ -3106,7 +3107,7 @@
           <a:p>
             <a:fld id="{267EFEEF-E18A-4475-85ED-60EC09292CB4}" type="datetimeFigureOut">
               <a:rPr kumimoji="1" lang="ja-JP" altLang="en-US" smtClean="0"/>
-              <a:t>2025/12/31</a:t>
+              <a:t>2026/7/28</a:t>
             </a:fld>
             <a:endParaRPr kumimoji="1" lang="ja-JP" altLang="en-US"/>
           </a:p>
@@ -3394,7 +3395,7 @@
           <a:p>
             <a:fld id="{267EFEEF-E18A-4475-85ED-60EC09292CB4}" type="datetimeFigureOut">
               <a:rPr kumimoji="1" lang="ja-JP" altLang="en-US" smtClean="0"/>
-              <a:t>2025/12/31</a:t>
+              <a:t>2026/7/28</a:t>
             </a:fld>
             <a:endParaRPr kumimoji="1" lang="ja-JP" altLang="en-US"/>
           </a:p>
@@ -3667,7 +3668,7 @@
           <a:p>
             <a:fld id="{267EFEEF-E18A-4475-85ED-60EC09292CB4}" type="datetimeFigureOut">
               <a:rPr kumimoji="1" lang="ja-JP" altLang="en-US" smtClean="0"/>
-              <a:t>2025/12/31</a:t>
+              <a:t>2026/7/28</a:t>
             </a:fld>
             <a:endParaRPr kumimoji="1" lang="ja-JP" altLang="en-US"/>
           </a:p>
@@ -12852,6 +12853,879 @@
     <p:extLst>
       <p:ext uri="{BB962C8B-B14F-4D97-AF65-F5344CB8AC3E}">
         <p14:creationId xmlns:p14="http://schemas.microsoft.com/office/powerpoint/2010/main" val="1605408925"/>
+      </p:ext>
+    </p:extLst>
+  </p:cSld>
+  <p:clrMapOvr>
+    <a:masterClrMapping/>
+  </p:clrMapOvr>
+</p:sld>
+</file>
+
+<file path=ppt/slides/slide4.xml><?xml version="1.0" encoding="utf-8"?>
+<p:sld xmlns:a="http://schemas.openxmlformats.org/drawingml/2006/main" xmlns:r="http://schemas.openxmlformats.org/officeDocument/2006/relationships" xmlns:p="http://schemas.openxmlformats.org/presentationml/2006/main">
+  <p:cSld>
+    <p:spTree>
+      <p:nvGrpSpPr>
+        <p:cNvPr id="1" name=""/>
+        <p:cNvGrpSpPr/>
+        <p:nvPr/>
+      </p:nvGrpSpPr>
+      <p:grpSpPr>
+        <a:xfrm>
+          <a:off x="0" y="0"/>
+          <a:ext cx="0" cy="0"/>
+          <a:chOff x="0" y="0"/>
+          <a:chExt cx="0" cy="0"/>
+        </a:xfrm>
+      </p:grpSpPr>
+      <p:sp>
+        <p:nvSpPr>
+          <p:cNvPr id="4" name="正方形/長方形 3">
+            <a:extLst>
+              <a:ext uri="{FF2B5EF4-FFF2-40B4-BE49-F238E27FC236}">
+                <a16:creationId xmlns:a16="http://schemas.microsoft.com/office/drawing/2014/main" id="{DDF5F531-3116-4425-A452-AD4BB1360E72}"/>
+              </a:ext>
+            </a:extLst>
+          </p:cNvPr>
+          <p:cNvSpPr/>
+          <p:nvPr/>
+        </p:nvSpPr>
+        <p:spPr>
+          <a:xfrm>
+            <a:off x="0" y="0"/>
+            <a:ext cx="12192000" cy="406718"/>
+          </a:xfrm>
+          <a:prstGeom prst="rect">
+            <a:avLst/>
+          </a:prstGeom>
+          <a:noFill/>
+          <a:ln>
+            <a:noFill/>
+          </a:ln>
+        </p:spPr>
+        <p:style>
+          <a:lnRef idx="2">
+            <a:schemeClr val="accent1">
+              <a:shade val="50000"/>
+            </a:schemeClr>
+          </a:lnRef>
+          <a:fillRef idx="1">
+            <a:schemeClr val="accent1"/>
+          </a:fillRef>
+          <a:effectRef idx="0">
+            <a:schemeClr val="accent1"/>
+          </a:effectRef>
+          <a:fontRef idx="minor">
+            <a:schemeClr val="lt1"/>
+          </a:fontRef>
+        </p:style>
+        <p:txBody>
+          <a:bodyPr rtlCol="0" anchor="t" anchorCtr="0"/>
+          <a:lstStyle/>
+          <a:p>
+            <a:r>
+              <a:rPr lang="en-US" altLang="ja-JP" sz="2000" b="1" dirty="0" err="1">
+                <a:solidFill>
+                  <a:schemeClr val="tx1"/>
+                </a:solidFill>
+              </a:rPr>
+              <a:t>e</a:t>
+            </a:r>
+            <a:r>
+              <a:rPr kumimoji="1" lang="en-US" altLang="ja-JP" sz="2000" b="1" dirty="0" err="1">
+                <a:solidFill>
+                  <a:schemeClr val="tx1"/>
+                </a:solidFill>
+              </a:rPr>
+              <a:t>fw</a:t>
+            </a:r>
+            <a:r>
+              <a:rPr kumimoji="1" lang="en-US" altLang="ja-JP" sz="2000" b="1" dirty="0">
+                <a:solidFill>
+                  <a:schemeClr val="tx1"/>
+                </a:solidFill>
+              </a:rPr>
+              <a:t> framework </a:t>
+            </a:r>
+            <a:r>
+              <a:rPr lang="en-US" altLang="ja-JP" sz="2000" b="1" dirty="0">
+                <a:solidFill>
+                  <a:schemeClr val="tx1"/>
+                </a:solidFill>
+              </a:rPr>
+              <a:t>(Deployment)</a:t>
+            </a:r>
+            <a:endParaRPr kumimoji="1" lang="ja-JP" altLang="en-US" sz="2000" b="1" dirty="0">
+              <a:solidFill>
+                <a:schemeClr val="tx1"/>
+              </a:solidFill>
+            </a:endParaRPr>
+          </a:p>
+        </p:txBody>
+      </p:sp>
+      <p:sp>
+        <p:nvSpPr>
+          <p:cNvPr id="39" name="矢印: 左 38">
+            <a:extLst>
+              <a:ext uri="{FF2B5EF4-FFF2-40B4-BE49-F238E27FC236}">
+                <a16:creationId xmlns:a16="http://schemas.microsoft.com/office/drawing/2014/main" id="{AB172D22-310C-4996-9933-A3841BDA052A}"/>
+              </a:ext>
+            </a:extLst>
+          </p:cNvPr>
+          <p:cNvSpPr/>
+          <p:nvPr/>
+        </p:nvSpPr>
+        <p:spPr>
+          <a:xfrm flipH="1">
+            <a:off x="3900219" y="1538002"/>
+            <a:ext cx="1798319" cy="1111060"/>
+          </a:xfrm>
+          <a:prstGeom prst="leftArrow">
+            <a:avLst/>
+          </a:prstGeom>
+          <a:ln>
+            <a:noFill/>
+          </a:ln>
+        </p:spPr>
+        <p:style>
+          <a:lnRef idx="1">
+            <a:schemeClr val="accent5"/>
+          </a:lnRef>
+          <a:fillRef idx="2">
+            <a:schemeClr val="accent5"/>
+          </a:fillRef>
+          <a:effectRef idx="1">
+            <a:schemeClr val="accent5"/>
+          </a:effectRef>
+          <a:fontRef idx="minor">
+            <a:schemeClr val="dk1"/>
+          </a:fontRef>
+        </p:style>
+        <p:txBody>
+          <a:bodyPr rtlCol="0" anchor="ctr"/>
+          <a:lstStyle/>
+          <a:p>
+            <a:pPr algn="ctr"/>
+            <a:endParaRPr kumimoji="1" lang="ja-JP" altLang="en-US"/>
+          </a:p>
+        </p:txBody>
+      </p:sp>
+      <p:grpSp>
+        <p:nvGrpSpPr>
+          <p:cNvPr id="11" name="グループ化 10">
+            <a:extLst>
+              <a:ext uri="{FF2B5EF4-FFF2-40B4-BE49-F238E27FC236}">
+                <a16:creationId xmlns:a16="http://schemas.microsoft.com/office/drawing/2014/main" id="{9DE50673-1C1A-4F9B-A75F-98E6755B8967}"/>
+              </a:ext>
+            </a:extLst>
+          </p:cNvPr>
+          <p:cNvGrpSpPr/>
+          <p:nvPr/>
+        </p:nvGrpSpPr>
+        <p:grpSpPr>
+          <a:xfrm>
+            <a:off x="771946" y="1606043"/>
+            <a:ext cx="1820539" cy="1872032"/>
+            <a:chOff x="318926" y="1314140"/>
+            <a:chExt cx="1820539" cy="1872032"/>
+          </a:xfrm>
+        </p:grpSpPr>
+        <p:pic>
+          <p:nvPicPr>
+            <p:cNvPr id="10" name="Picture 4" descr="採用者・発注者目線】講師が現役プログラマのプログラミングスクール3選 | 40代独身男が生き抜くブログ">
+              <a:extLst>
+                <a:ext uri="{FF2B5EF4-FFF2-40B4-BE49-F238E27FC236}">
+                  <a16:creationId xmlns:a16="http://schemas.microsoft.com/office/drawing/2014/main" id="{D8B37ED8-DBB4-44E6-A243-9A01FC57B587}"/>
+                </a:ext>
+              </a:extLst>
+            </p:cNvPr>
+            <p:cNvPicPr>
+              <a:picLocks noChangeAspect="1" noChangeArrowheads="1"/>
+            </p:cNvPicPr>
+            <p:nvPr/>
+          </p:nvPicPr>
+          <p:blipFill>
+            <a:blip r:embed="rId2">
+              <a:extLst>
+                <a:ext uri="{28A0092B-C50C-407E-A947-70E740481C1C}">
+                  <a14:useLocalDpi xmlns:a14="http://schemas.microsoft.com/office/drawing/2010/main" val="0"/>
+                </a:ext>
+              </a:extLst>
+            </a:blip>
+            <a:srcRect/>
+            <a:stretch>
+              <a:fillRect/>
+            </a:stretch>
+          </p:blipFill>
+          <p:spPr bwMode="auto">
+            <a:xfrm>
+              <a:off x="318926" y="1314140"/>
+              <a:ext cx="1809875" cy="1872032"/>
+            </a:xfrm>
+            <a:prstGeom prst="rect">
+              <a:avLst/>
+            </a:prstGeom>
+            <a:noFill/>
+            <a:extLst>
+              <a:ext uri="{909E8E84-426E-40DD-AFC4-6F175D3DCCD1}">
+                <a14:hiddenFill xmlns:a14="http://schemas.microsoft.com/office/drawing/2010/main">
+                  <a:solidFill>
+                    <a:srgbClr val="FFFFFF"/>
+                  </a:solidFill>
+                </a14:hiddenFill>
+              </a:ext>
+            </a:extLst>
+          </p:spPr>
+        </p:pic>
+        <p:pic>
+          <p:nvPicPr>
+            <p:cNvPr id="1030" name="Picture 6" descr="Windows 7 のロゴ、Windows 11 のカラー/カラースキーム : r/windows">
+              <a:extLst>
+                <a:ext uri="{FF2B5EF4-FFF2-40B4-BE49-F238E27FC236}">
+                  <a16:creationId xmlns:a16="http://schemas.microsoft.com/office/drawing/2014/main" id="{49E9C4F6-BC93-4AD4-B761-5D09C175A0C2}"/>
+                </a:ext>
+              </a:extLst>
+            </p:cNvPr>
+            <p:cNvPicPr>
+              <a:picLocks noChangeAspect="1" noChangeArrowheads="1"/>
+            </p:cNvPicPr>
+            <p:nvPr/>
+          </p:nvPicPr>
+          <p:blipFill>
+            <a:blip r:embed="rId3">
+              <a:extLst>
+                <a:ext uri="{28A0092B-C50C-407E-A947-70E740481C1C}">
+                  <a14:useLocalDpi xmlns:a14="http://schemas.microsoft.com/office/drawing/2010/main" val="0"/>
+                </a:ext>
+              </a:extLst>
+            </a:blip>
+            <a:srcRect/>
+            <a:stretch>
+              <a:fillRect/>
+            </a:stretch>
+          </p:blipFill>
+          <p:spPr bwMode="auto">
+            <a:xfrm>
+              <a:off x="1044520" y="2008181"/>
+              <a:ext cx="1094945" cy="729963"/>
+            </a:xfrm>
+            <a:prstGeom prst="rect">
+              <a:avLst/>
+            </a:prstGeom>
+            <a:noFill/>
+            <a:extLst>
+              <a:ext uri="{909E8E84-426E-40DD-AFC4-6F175D3DCCD1}">
+                <a14:hiddenFill xmlns:a14="http://schemas.microsoft.com/office/drawing/2010/main">
+                  <a:solidFill>
+                    <a:srgbClr val="FFFFFF"/>
+                  </a:solidFill>
+                </a14:hiddenFill>
+              </a:ext>
+            </a:extLst>
+          </p:spPr>
+        </p:pic>
+      </p:grpSp>
+      <p:pic>
+        <p:nvPicPr>
+          <p:cNvPr id="19" name="Picture 8" descr="LINUXサーバー Intel Denverton世代Atom C3558搭載 5ベイ デスクトップNAS N5825 |  エム・シー・エム・ジャパン株式会社">
+            <a:extLst>
+              <a:ext uri="{FF2B5EF4-FFF2-40B4-BE49-F238E27FC236}">
+                <a16:creationId xmlns:a16="http://schemas.microsoft.com/office/drawing/2014/main" id="{89CCC5CA-938F-40A4-8CA7-DA73A15C60A0}"/>
+              </a:ext>
+            </a:extLst>
+          </p:cNvPr>
+          <p:cNvPicPr>
+            <a:picLocks noChangeAspect="1" noChangeArrowheads="1"/>
+          </p:cNvPicPr>
+          <p:nvPr/>
+        </p:nvPicPr>
+        <p:blipFill>
+          <a:blip r:embed="rId4">
+            <a:extLst>
+              <a:ext uri="{28A0092B-C50C-407E-A947-70E740481C1C}">
+                <a14:useLocalDpi xmlns:a14="http://schemas.microsoft.com/office/drawing/2010/main" val="0"/>
+              </a:ext>
+            </a:extLst>
+          </a:blip>
+          <a:srcRect/>
+          <a:stretch>
+            <a:fillRect/>
+          </a:stretch>
+        </p:blipFill>
+        <p:spPr bwMode="auto">
+          <a:xfrm>
+            <a:off x="5698538" y="1364409"/>
+            <a:ext cx="749308" cy="749308"/>
+          </a:xfrm>
+          <a:prstGeom prst="rect">
+            <a:avLst/>
+          </a:prstGeom>
+          <a:noFill/>
+          <a:extLst>
+            <a:ext uri="{909E8E84-426E-40DD-AFC4-6F175D3DCCD1}">
+              <a14:hiddenFill xmlns:a14="http://schemas.microsoft.com/office/drawing/2010/main">
+                <a:solidFill>
+                  <a:srgbClr val="FFFFFF"/>
+                </a:solidFill>
+              </a14:hiddenFill>
+            </a:ext>
+          </a:extLst>
+        </p:spPr>
+      </p:pic>
+      <p:pic>
+        <p:nvPicPr>
+          <p:cNvPr id="1038" name="Picture 14" descr="サーバー入門】Windows Server 2019の初回起動時にまず実施したい設定項目 - ITエンジニアの備忘録的技術ブログ【仮】">
+            <a:extLst>
+              <a:ext uri="{FF2B5EF4-FFF2-40B4-BE49-F238E27FC236}">
+                <a16:creationId xmlns:a16="http://schemas.microsoft.com/office/drawing/2014/main" id="{AE0698E2-F906-47C7-B8AD-CF442BE42565}"/>
+              </a:ext>
+            </a:extLst>
+          </p:cNvPr>
+          <p:cNvPicPr>
+            <a:picLocks noChangeAspect="1" noChangeArrowheads="1"/>
+          </p:cNvPicPr>
+          <p:nvPr/>
+        </p:nvPicPr>
+        <p:blipFill>
+          <a:blip r:embed="rId5">
+            <a:extLst>
+              <a:ext uri="{28A0092B-C50C-407E-A947-70E740481C1C}">
+                <a14:useLocalDpi xmlns:a14="http://schemas.microsoft.com/office/drawing/2010/main" val="0"/>
+              </a:ext>
+            </a:extLst>
+          </a:blip>
+          <a:srcRect/>
+          <a:stretch>
+            <a:fillRect/>
+          </a:stretch>
+        </p:blipFill>
+        <p:spPr bwMode="auto">
+          <a:xfrm>
+            <a:off x="6603114" y="1997449"/>
+            <a:ext cx="1918260" cy="1013456"/>
+          </a:xfrm>
+          <a:prstGeom prst="rect">
+            <a:avLst/>
+          </a:prstGeom>
+          <a:noFill/>
+          <a:extLst>
+            <a:ext uri="{909E8E84-426E-40DD-AFC4-6F175D3DCCD1}">
+              <a14:hiddenFill xmlns:a14="http://schemas.microsoft.com/office/drawing/2010/main">
+                <a:solidFill>
+                  <a:srgbClr val="FFFFFF"/>
+                </a:solidFill>
+              </a14:hiddenFill>
+            </a:ext>
+          </a:extLst>
+        </p:spPr>
+      </p:pic>
+      <p:pic>
+        <p:nvPicPr>
+          <p:cNvPr id="1044" name="Picture 20" descr="Linux ロゴ の アイコン">
+            <a:extLst>
+              <a:ext uri="{FF2B5EF4-FFF2-40B4-BE49-F238E27FC236}">
+                <a16:creationId xmlns:a16="http://schemas.microsoft.com/office/drawing/2014/main" id="{655854D2-BDC5-432E-ACBF-442065BA5B64}"/>
+              </a:ext>
+            </a:extLst>
+          </p:cNvPr>
+          <p:cNvPicPr>
+            <a:picLocks noChangeAspect="1" noChangeArrowheads="1"/>
+          </p:cNvPicPr>
+          <p:nvPr/>
+        </p:nvPicPr>
+        <p:blipFill>
+          <a:blip r:embed="rId6">
+            <a:extLst>
+              <a:ext uri="{28A0092B-C50C-407E-A947-70E740481C1C}">
+                <a14:useLocalDpi xmlns:a14="http://schemas.microsoft.com/office/drawing/2010/main" val="0"/>
+              </a:ext>
+            </a:extLst>
+          </a:blip>
+          <a:srcRect/>
+          <a:stretch>
+            <a:fillRect/>
+          </a:stretch>
+        </p:blipFill>
+        <p:spPr bwMode="auto">
+          <a:xfrm>
+            <a:off x="6581192" y="1267757"/>
+            <a:ext cx="1918260" cy="959130"/>
+          </a:xfrm>
+          <a:prstGeom prst="rect">
+            <a:avLst/>
+          </a:prstGeom>
+          <a:noFill/>
+          <a:extLst>
+            <a:ext uri="{909E8E84-426E-40DD-AFC4-6F175D3DCCD1}">
+              <a14:hiddenFill xmlns:a14="http://schemas.microsoft.com/office/drawing/2010/main">
+                <a:solidFill>
+                  <a:srgbClr val="FFFFFF"/>
+                </a:solidFill>
+              </a14:hiddenFill>
+            </a:ext>
+          </a:extLst>
+        </p:spPr>
+      </p:pic>
+      <p:pic>
+        <p:nvPicPr>
+          <p:cNvPr id="22" name="Picture 22" descr="Creating and Testing a Simple AWS Lambda Function in .NET | by Osama Haider  | Medium">
+            <a:extLst>
+              <a:ext uri="{FF2B5EF4-FFF2-40B4-BE49-F238E27FC236}">
+                <a16:creationId xmlns:a16="http://schemas.microsoft.com/office/drawing/2014/main" id="{8B4C9459-817F-4B4A-BB49-E45D76EB9F99}"/>
+              </a:ext>
+            </a:extLst>
+          </p:cNvPr>
+          <p:cNvPicPr>
+            <a:picLocks noChangeAspect="1" noChangeArrowheads="1"/>
+          </p:cNvPicPr>
+          <p:nvPr/>
+        </p:nvPicPr>
+        <p:blipFill>
+          <a:blip r:embed="rId7">
+            <a:extLst>
+              <a:ext uri="{28A0092B-C50C-407E-A947-70E740481C1C}">
+                <a14:useLocalDpi xmlns:a14="http://schemas.microsoft.com/office/drawing/2010/main" val="0"/>
+              </a:ext>
+            </a:extLst>
+          </a:blip>
+          <a:srcRect/>
+          <a:stretch>
+            <a:fillRect/>
+          </a:stretch>
+        </p:blipFill>
+        <p:spPr bwMode="auto">
+          <a:xfrm>
+            <a:off x="6493464" y="3232578"/>
+            <a:ext cx="2184952" cy="1229036"/>
+          </a:xfrm>
+          <a:prstGeom prst="rect">
+            <a:avLst/>
+          </a:prstGeom>
+          <a:noFill/>
+          <a:extLst>
+            <a:ext uri="{909E8E84-426E-40DD-AFC4-6F175D3DCCD1}">
+              <a14:hiddenFill xmlns:a14="http://schemas.microsoft.com/office/drawing/2010/main">
+                <a:solidFill>
+                  <a:srgbClr val="FFFFFF"/>
+                </a:solidFill>
+              </a14:hiddenFill>
+            </a:ext>
+          </a:extLst>
+        </p:spPr>
+      </p:pic>
+      <p:pic>
+        <p:nvPicPr>
+          <p:cNvPr id="24" name="Picture 24" descr="クラウド」アイコンのフリー素材（商用可）">
+            <a:extLst>
+              <a:ext uri="{FF2B5EF4-FFF2-40B4-BE49-F238E27FC236}">
+                <a16:creationId xmlns:a16="http://schemas.microsoft.com/office/drawing/2014/main" id="{E620D7D0-4AC8-4100-A0AC-2E64E3BA6728}"/>
+              </a:ext>
+            </a:extLst>
+          </p:cNvPr>
+          <p:cNvPicPr>
+            <a:picLocks noChangeAspect="1" noChangeArrowheads="1"/>
+          </p:cNvPicPr>
+          <p:nvPr/>
+        </p:nvPicPr>
+        <p:blipFill>
+          <a:blip r:embed="rId8">
+            <a:extLst>
+              <a:ext uri="{28A0092B-C50C-407E-A947-70E740481C1C}">
+                <a14:useLocalDpi xmlns:a14="http://schemas.microsoft.com/office/drawing/2010/main" val="0"/>
+              </a:ext>
+            </a:extLst>
+          </a:blip>
+          <a:srcRect/>
+          <a:stretch>
+            <a:fillRect/>
+          </a:stretch>
+        </p:blipFill>
+        <p:spPr bwMode="auto">
+          <a:xfrm>
+            <a:off x="5716509" y="3311851"/>
+            <a:ext cx="890611" cy="890611"/>
+          </a:xfrm>
+          <a:prstGeom prst="rect">
+            <a:avLst/>
+          </a:prstGeom>
+          <a:noFill/>
+          <a:extLst>
+            <a:ext uri="{909E8E84-426E-40DD-AFC4-6F175D3DCCD1}">
+              <a14:hiddenFill xmlns:a14="http://schemas.microsoft.com/office/drawing/2010/main">
+                <a:solidFill>
+                  <a:srgbClr val="FFFFFF"/>
+                </a:solidFill>
+              </a14:hiddenFill>
+            </a:ext>
+          </a:extLst>
+        </p:spPr>
+      </p:pic>
+      <p:pic>
+        <p:nvPicPr>
+          <p:cNvPr id="61" name="Picture 8" descr="LINUXサーバー Intel Denverton世代Atom C3558搭載 5ベイ デスクトップNAS N5825 |  エム・シー・エム・ジャパン株式会社">
+            <a:extLst>
+              <a:ext uri="{FF2B5EF4-FFF2-40B4-BE49-F238E27FC236}">
+                <a16:creationId xmlns:a16="http://schemas.microsoft.com/office/drawing/2014/main" id="{860810E3-C95F-4731-8E45-04413C0BBBCA}"/>
+              </a:ext>
+            </a:extLst>
+          </p:cNvPr>
+          <p:cNvPicPr>
+            <a:picLocks noChangeAspect="1" noChangeArrowheads="1"/>
+          </p:cNvPicPr>
+          <p:nvPr/>
+        </p:nvPicPr>
+        <p:blipFill>
+          <a:blip r:embed="rId4">
+            <a:extLst>
+              <a:ext uri="{28A0092B-C50C-407E-A947-70E740481C1C}">
+                <a14:useLocalDpi xmlns:a14="http://schemas.microsoft.com/office/drawing/2010/main" val="0"/>
+              </a:ext>
+            </a:extLst>
+          </a:blip>
+          <a:srcRect/>
+          <a:stretch>
+            <a:fillRect/>
+          </a:stretch>
+        </p:blipFill>
+        <p:spPr bwMode="auto">
+          <a:xfrm>
+            <a:off x="5698538" y="2167405"/>
+            <a:ext cx="749308" cy="749308"/>
+          </a:xfrm>
+          <a:prstGeom prst="rect">
+            <a:avLst/>
+          </a:prstGeom>
+          <a:noFill/>
+          <a:extLst>
+            <a:ext uri="{909E8E84-426E-40DD-AFC4-6F175D3DCCD1}">
+              <a14:hiddenFill xmlns:a14="http://schemas.microsoft.com/office/drawing/2010/main">
+                <a:solidFill>
+                  <a:srgbClr val="FFFFFF"/>
+                </a:solidFill>
+              </a14:hiddenFill>
+            </a:ext>
+          </a:extLst>
+        </p:spPr>
+      </p:pic>
+      <p:pic>
+        <p:nvPicPr>
+          <p:cNvPr id="1050" name="Picture 26" descr="Windows】コマンドでzipファイルを作る at softelメモ">
+            <a:extLst>
+              <a:ext uri="{FF2B5EF4-FFF2-40B4-BE49-F238E27FC236}">
+                <a16:creationId xmlns:a16="http://schemas.microsoft.com/office/drawing/2014/main" id="{B3F2BD99-0FB3-457E-A894-198DAFDDFC1C}"/>
+              </a:ext>
+            </a:extLst>
+          </p:cNvPr>
+          <p:cNvPicPr>
+            <a:picLocks noChangeAspect="1" noChangeArrowheads="1"/>
+          </p:cNvPicPr>
+          <p:nvPr/>
+        </p:nvPicPr>
+        <p:blipFill>
+          <a:blip r:embed="rId9">
+            <a:extLst>
+              <a:ext uri="{28A0092B-C50C-407E-A947-70E740481C1C}">
+                <a14:useLocalDpi xmlns:a14="http://schemas.microsoft.com/office/drawing/2010/main" val="0"/>
+              </a:ext>
+            </a:extLst>
+          </a:blip>
+          <a:srcRect/>
+          <a:stretch>
+            <a:fillRect/>
+          </a:stretch>
+        </p:blipFill>
+        <p:spPr bwMode="auto">
+          <a:xfrm>
+            <a:off x="3163035" y="2127546"/>
+            <a:ext cx="548640" cy="548640"/>
+          </a:xfrm>
+          <a:prstGeom prst="rect">
+            <a:avLst/>
+          </a:prstGeom>
+          <a:noFill/>
+          <a:extLst>
+            <a:ext uri="{909E8E84-426E-40DD-AFC4-6F175D3DCCD1}">
+              <a14:hiddenFill xmlns:a14="http://schemas.microsoft.com/office/drawing/2010/main">
+                <a:solidFill>
+                  <a:srgbClr val="FFFFFF"/>
+                </a:solidFill>
+              </a14:hiddenFill>
+            </a:ext>
+          </a:extLst>
+        </p:spPr>
+      </p:pic>
+      <p:pic>
+        <p:nvPicPr>
+          <p:cNvPr id="1052" name="Picture 28" descr="開いたフォルダ アイコン Generic color lineal-color｜Magnific（旧Freepik）">
+            <a:extLst>
+              <a:ext uri="{FF2B5EF4-FFF2-40B4-BE49-F238E27FC236}">
+                <a16:creationId xmlns:a16="http://schemas.microsoft.com/office/drawing/2014/main" id="{8F495546-8275-40D5-9733-4EB6D3415430}"/>
+              </a:ext>
+            </a:extLst>
+          </p:cNvPr>
+          <p:cNvPicPr>
+            <a:picLocks noChangeAspect="1" noChangeArrowheads="1"/>
+          </p:cNvPicPr>
+          <p:nvPr/>
+        </p:nvPicPr>
+        <p:blipFill>
+          <a:blip r:embed="rId10">
+            <a:extLst>
+              <a:ext uri="{28A0092B-C50C-407E-A947-70E740481C1C}">
+                <a14:useLocalDpi xmlns:a14="http://schemas.microsoft.com/office/drawing/2010/main" val="0"/>
+              </a:ext>
+            </a:extLst>
+          </a:blip>
+          <a:srcRect/>
+          <a:stretch>
+            <a:fillRect/>
+          </a:stretch>
+        </p:blipFill>
+        <p:spPr bwMode="auto">
+          <a:xfrm>
+            <a:off x="3217528" y="1448809"/>
+            <a:ext cx="548640" cy="548640"/>
+          </a:xfrm>
+          <a:prstGeom prst="rect">
+            <a:avLst/>
+          </a:prstGeom>
+          <a:noFill/>
+          <a:extLst>
+            <a:ext uri="{909E8E84-426E-40DD-AFC4-6F175D3DCCD1}">
+              <a14:hiddenFill xmlns:a14="http://schemas.microsoft.com/office/drawing/2010/main">
+                <a:solidFill>
+                  <a:srgbClr val="FFFFFF"/>
+                </a:solidFill>
+              </a14:hiddenFill>
+            </a:ext>
+          </a:extLst>
+        </p:spPr>
+      </p:pic>
+      <p:pic>
+        <p:nvPicPr>
+          <p:cNvPr id="1054" name="Picture 30" descr="Dockerモニタリング - InstanaのAIを活用したAPMソリューションの一部 | IBM">
+            <a:extLst>
+              <a:ext uri="{FF2B5EF4-FFF2-40B4-BE49-F238E27FC236}">
+                <a16:creationId xmlns:a16="http://schemas.microsoft.com/office/drawing/2014/main" id="{F9F66A79-78A2-4BF3-BEBF-58678EC3E3B3}"/>
+              </a:ext>
+            </a:extLst>
+          </p:cNvPr>
+          <p:cNvPicPr>
+            <a:picLocks noChangeAspect="1" noChangeArrowheads="1"/>
+          </p:cNvPicPr>
+          <p:nvPr/>
+        </p:nvPicPr>
+        <p:blipFill>
+          <a:blip r:embed="rId11">
+            <a:extLst>
+              <a:ext uri="{28A0092B-C50C-407E-A947-70E740481C1C}">
+                <a14:useLocalDpi xmlns:a14="http://schemas.microsoft.com/office/drawing/2010/main" val="0"/>
+              </a:ext>
+            </a:extLst>
+          </a:blip>
+          <a:srcRect/>
+          <a:stretch>
+            <a:fillRect/>
+          </a:stretch>
+        </p:blipFill>
+        <p:spPr bwMode="auto">
+          <a:xfrm>
+            <a:off x="2700892" y="3172446"/>
+            <a:ext cx="1472926" cy="1111060"/>
+          </a:xfrm>
+          <a:prstGeom prst="rect">
+            <a:avLst/>
+          </a:prstGeom>
+          <a:noFill/>
+          <a:extLst>
+            <a:ext uri="{909E8E84-426E-40DD-AFC4-6F175D3DCCD1}">
+              <a14:hiddenFill xmlns:a14="http://schemas.microsoft.com/office/drawing/2010/main">
+                <a:solidFill>
+                  <a:srgbClr val="FFFFFF"/>
+                </a:solidFill>
+              </a14:hiddenFill>
+            </a:ext>
+          </a:extLst>
+        </p:spPr>
+      </p:pic>
+      <p:sp>
+        <p:nvSpPr>
+          <p:cNvPr id="65" name="矢印: 左 64">
+            <a:extLst>
+              <a:ext uri="{FF2B5EF4-FFF2-40B4-BE49-F238E27FC236}">
+                <a16:creationId xmlns:a16="http://schemas.microsoft.com/office/drawing/2014/main" id="{B1CA4FA0-5F70-4AA6-A88E-CD6C087D3469}"/>
+              </a:ext>
+            </a:extLst>
+          </p:cNvPr>
+          <p:cNvSpPr/>
+          <p:nvPr/>
+        </p:nvSpPr>
+        <p:spPr>
+          <a:xfrm flipH="1">
+            <a:off x="3900218" y="3291566"/>
+            <a:ext cx="1798319" cy="1111060"/>
+          </a:xfrm>
+          <a:prstGeom prst="leftArrow">
+            <a:avLst/>
+          </a:prstGeom>
+          <a:ln>
+            <a:noFill/>
+          </a:ln>
+        </p:spPr>
+        <p:style>
+          <a:lnRef idx="1">
+            <a:schemeClr val="accent5"/>
+          </a:lnRef>
+          <a:fillRef idx="2">
+            <a:schemeClr val="accent5"/>
+          </a:fillRef>
+          <a:effectRef idx="1">
+            <a:schemeClr val="accent5"/>
+          </a:effectRef>
+          <a:fontRef idx="minor">
+            <a:schemeClr val="dk1"/>
+          </a:fontRef>
+        </p:style>
+        <p:txBody>
+          <a:bodyPr rtlCol="0" anchor="ctr"/>
+          <a:lstStyle/>
+          <a:p>
+            <a:pPr algn="ctr"/>
+            <a:endParaRPr kumimoji="1" lang="ja-JP" altLang="en-US"/>
+          </a:p>
+        </p:txBody>
+      </p:sp>
+      <p:sp>
+        <p:nvSpPr>
+          <p:cNvPr id="66" name="四角形: 角を丸くする 65">
+            <a:extLst>
+              <a:ext uri="{FF2B5EF4-FFF2-40B4-BE49-F238E27FC236}">
+                <a16:creationId xmlns:a16="http://schemas.microsoft.com/office/drawing/2014/main" id="{7F2B7E77-F4E5-4CCF-B22F-6E8D7BDF1B9B}"/>
+              </a:ext>
+            </a:extLst>
+          </p:cNvPr>
+          <p:cNvSpPr/>
+          <p:nvPr/>
+        </p:nvSpPr>
+        <p:spPr>
+          <a:xfrm>
+            <a:off x="2856745" y="957215"/>
+            <a:ext cx="2327978" cy="433664"/>
+          </a:xfrm>
+          <a:prstGeom prst="roundRect">
+            <a:avLst/>
+          </a:prstGeom>
+          <a:solidFill>
+            <a:schemeClr val="bg1"/>
+          </a:solidFill>
+          <a:ln>
+            <a:noFill/>
+          </a:ln>
+        </p:spPr>
+        <p:style>
+          <a:lnRef idx="2">
+            <a:schemeClr val="accent1">
+              <a:shade val="50000"/>
+            </a:schemeClr>
+          </a:lnRef>
+          <a:fillRef idx="1">
+            <a:schemeClr val="accent1"/>
+          </a:fillRef>
+          <a:effectRef idx="0">
+            <a:schemeClr val="accent1"/>
+          </a:effectRef>
+          <a:fontRef idx="minor">
+            <a:schemeClr val="lt1"/>
+          </a:fontRef>
+        </p:style>
+        <p:txBody>
+          <a:bodyPr rtlCol="0" anchor="ctr"/>
+          <a:lstStyle/>
+          <a:p>
+            <a:r>
+              <a:rPr kumimoji="1" lang="en-US" altLang="ja-JP" dirty="0">
+                <a:solidFill>
+                  <a:schemeClr val="tx1"/>
+                </a:solidFill>
+              </a:rPr>
+              <a:t>Folder or War file</a:t>
+            </a:r>
+            <a:endParaRPr kumimoji="1" lang="ja-JP" altLang="en-US" dirty="0">
+              <a:solidFill>
+                <a:schemeClr val="tx1"/>
+              </a:solidFill>
+            </a:endParaRPr>
+          </a:p>
+        </p:txBody>
+      </p:sp>
+      <p:sp>
+        <p:nvSpPr>
+          <p:cNvPr id="67" name="四角形: 角を丸くする 66">
+            <a:extLst>
+              <a:ext uri="{FF2B5EF4-FFF2-40B4-BE49-F238E27FC236}">
+                <a16:creationId xmlns:a16="http://schemas.microsoft.com/office/drawing/2014/main" id="{E7724CEE-4D74-48FE-B730-3A39243E618F}"/>
+              </a:ext>
+            </a:extLst>
+          </p:cNvPr>
+          <p:cNvSpPr/>
+          <p:nvPr/>
+        </p:nvSpPr>
+        <p:spPr>
+          <a:xfrm>
+            <a:off x="2856745" y="3013017"/>
+            <a:ext cx="2094028" cy="433664"/>
+          </a:xfrm>
+          <a:prstGeom prst="roundRect">
+            <a:avLst/>
+          </a:prstGeom>
+          <a:solidFill>
+            <a:schemeClr val="bg1"/>
+          </a:solidFill>
+          <a:ln>
+            <a:noFill/>
+          </a:ln>
+        </p:spPr>
+        <p:style>
+          <a:lnRef idx="2">
+            <a:schemeClr val="accent1">
+              <a:shade val="50000"/>
+            </a:schemeClr>
+          </a:lnRef>
+          <a:fillRef idx="1">
+            <a:schemeClr val="accent1"/>
+          </a:fillRef>
+          <a:effectRef idx="0">
+            <a:schemeClr val="accent1"/>
+          </a:effectRef>
+          <a:fontRef idx="minor">
+            <a:schemeClr val="lt1"/>
+          </a:fontRef>
+        </p:style>
+        <p:txBody>
+          <a:bodyPr rtlCol="0" anchor="ctr"/>
+          <a:lstStyle/>
+          <a:p>
+            <a:r>
+              <a:rPr kumimoji="1" lang="en-US" altLang="ja-JP" dirty="0">
+                <a:solidFill>
+                  <a:schemeClr val="tx1"/>
+                </a:solidFill>
+              </a:rPr>
+              <a:t>Docker image</a:t>
+            </a:r>
+            <a:endParaRPr kumimoji="1" lang="ja-JP" altLang="en-US" dirty="0">
+              <a:solidFill>
+                <a:schemeClr val="tx1"/>
+              </a:solidFill>
+            </a:endParaRPr>
+          </a:p>
+        </p:txBody>
+      </p:sp>
+    </p:spTree>
+    <p:extLst>
+      <p:ext uri="{BB962C8B-B14F-4D97-AF65-F5344CB8AC3E}">
+        <p14:creationId xmlns:p14="http://schemas.microsoft.com/office/powerpoint/2010/main" val="664912872"/>
       </p:ext>
     </p:extLst>
   </p:cSld>
